--- a/Streaming Content Success Analysis.pptx
+++ b/Streaming Content Success Analysis.pptx
@@ -16,16 +16,17 @@
     <p:sldId id="264" r:id="rId10"/>
     <p:sldId id="265" r:id="rId11"/>
     <p:sldId id="266" r:id="rId12"/>
-    <p:sldId id="267" r:id="rId13"/>
-    <p:sldId id="268" r:id="rId14"/>
-    <p:sldId id="269" r:id="rId15"/>
-    <p:sldId id="270" r:id="rId16"/>
-    <p:sldId id="271" r:id="rId17"/>
-    <p:sldId id="272" r:id="rId18"/>
-    <p:sldId id="273" r:id="rId19"/>
-    <p:sldId id="276" r:id="rId20"/>
-    <p:sldId id="274" r:id="rId21"/>
-    <p:sldId id="275" r:id="rId22"/>
+    <p:sldId id="277" r:id="rId13"/>
+    <p:sldId id="267" r:id="rId14"/>
+    <p:sldId id="268" r:id="rId15"/>
+    <p:sldId id="269" r:id="rId16"/>
+    <p:sldId id="270" r:id="rId17"/>
+    <p:sldId id="271" r:id="rId18"/>
+    <p:sldId id="272" r:id="rId19"/>
+    <p:sldId id="273" r:id="rId20"/>
+    <p:sldId id="276" r:id="rId21"/>
+    <p:sldId id="274" r:id="rId22"/>
+    <p:sldId id="275" r:id="rId23"/>
   </p:sldIdLst>
   <p:sldSz cx="12192000" cy="6858000"/>
   <p:notesSz cx="6858000" cy="9144000"/>
@@ -4591,6 +4592,103 @@
 <file path=ppt/slides/slide12.xml><?xml version="1.0" encoding="utf-8"?>
 <p:sld xmlns:a="http://schemas.openxmlformats.org/drawingml/2006/main" xmlns:r="http://schemas.openxmlformats.org/officeDocument/2006/relationships" xmlns:p="http://schemas.openxmlformats.org/presentationml/2006/main">
   <p:cSld>
+    <p:spTree>
+      <p:nvGrpSpPr>
+        <p:cNvPr id="1" name=""/>
+        <p:cNvGrpSpPr/>
+        <p:nvPr/>
+      </p:nvGrpSpPr>
+      <p:grpSpPr>
+        <a:xfrm>
+          <a:off x="0" y="0"/>
+          <a:ext cx="0" cy="0"/>
+          <a:chOff x="0" y="0"/>
+          <a:chExt cx="0" cy="0"/>
+        </a:xfrm>
+      </p:grpSpPr>
+      <p:sp>
+        <p:nvSpPr>
+          <p:cNvPr id="2" name="Title 1">
+            <a:extLst>
+              <a:ext uri="{FF2B5EF4-FFF2-40B4-BE49-F238E27FC236}">
+                <a16:creationId xmlns:a16="http://schemas.microsoft.com/office/drawing/2014/main" id="{2C76358B-7027-F433-8245-1FA5EC1BC89C}"/>
+              </a:ext>
+            </a:extLst>
+          </p:cNvPr>
+          <p:cNvSpPr>
+            <a:spLocks noGrp="1"/>
+          </p:cNvSpPr>
+          <p:nvPr>
+            <p:ph type="title"/>
+          </p:nvPr>
+        </p:nvSpPr>
+        <p:spPr/>
+        <p:txBody>
+          <a:bodyPr/>
+          <a:lstStyle/>
+          <a:p>
+            <a:r>
+              <a:rPr lang="en-IN" dirty="0">
+                <a:latin typeface="Times New Roman" panose="02020603050405020304" pitchFamily="18" charset="0"/>
+                <a:cs typeface="Times New Roman" panose="02020603050405020304" pitchFamily="18" charset="0"/>
+              </a:rPr>
+              <a:t>Trends and insights</a:t>
+            </a:r>
+          </a:p>
+        </p:txBody>
+      </p:sp>
+      <p:pic>
+        <p:nvPicPr>
+          <p:cNvPr id="4" name="Picture 3">
+            <a:extLst>
+              <a:ext uri="{FF2B5EF4-FFF2-40B4-BE49-F238E27FC236}">
+                <a16:creationId xmlns:a16="http://schemas.microsoft.com/office/drawing/2014/main" id="{C0F3876A-6736-A2D9-ED79-A02DD4A52847}"/>
+              </a:ext>
+            </a:extLst>
+          </p:cNvPr>
+          <p:cNvPicPr>
+            <a:picLocks noChangeAspect="1"/>
+          </p:cNvPicPr>
+          <p:nvPr/>
+        </p:nvPicPr>
+        <p:blipFill>
+          <a:blip r:embed="rId2">
+            <a:extLst>
+              <a:ext uri="{28A0092B-C50C-407E-A947-70E740481C1C}">
+                <a14:useLocalDpi xmlns:a14="http://schemas.microsoft.com/office/drawing/2010/main" val="0"/>
+              </a:ext>
+            </a:extLst>
+          </a:blip>
+          <a:stretch>
+            <a:fillRect/>
+          </a:stretch>
+        </p:blipFill>
+        <p:spPr>
+          <a:xfrm>
+            <a:off x="2191765" y="2010320"/>
+            <a:ext cx="7808470" cy="4363048"/>
+          </a:xfrm>
+          <a:prstGeom prst="rect">
+            <a:avLst/>
+          </a:prstGeom>
+        </p:spPr>
+      </p:pic>
+    </p:spTree>
+    <p:extLst>
+      <p:ext uri="{BB962C8B-B14F-4D97-AF65-F5344CB8AC3E}">
+        <p14:creationId xmlns:p14="http://schemas.microsoft.com/office/powerpoint/2010/main" val="2475086041"/>
+      </p:ext>
+    </p:extLst>
+  </p:cSld>
+  <p:clrMapOvr>
+    <a:masterClrMapping/>
+  </p:clrMapOvr>
+</p:sld>
+</file>
+
+<file path=ppt/slides/slide13.xml><?xml version="1.0" encoding="utf-8"?>
+<p:sld xmlns:a="http://schemas.openxmlformats.org/drawingml/2006/main" xmlns:r="http://schemas.openxmlformats.org/officeDocument/2006/relationships" xmlns:p="http://schemas.openxmlformats.org/presentationml/2006/main">
+  <p:cSld>
     <p:bg>
       <p:bgPr>
         <a:solidFill>
@@ -5286,7 +5384,7 @@
 </p:sld>
 </file>
 
-<file path=ppt/slides/slide13.xml><?xml version="1.0" encoding="utf-8"?>
+<file path=ppt/slides/slide14.xml><?xml version="1.0" encoding="utf-8"?>
 <p:sld xmlns:a="http://schemas.openxmlformats.org/drawingml/2006/main" xmlns:r="http://schemas.openxmlformats.org/officeDocument/2006/relationships" xmlns:p="http://schemas.openxmlformats.org/presentationml/2006/main">
   <p:cSld>
     <p:spTree>
@@ -5460,7 +5558,7 @@
 </p:sld>
 </file>
 
-<file path=ppt/slides/slide14.xml><?xml version="1.0" encoding="utf-8"?>
+<file path=ppt/slides/slide15.xml><?xml version="1.0" encoding="utf-8"?>
 <p:sld xmlns:a="http://schemas.openxmlformats.org/drawingml/2006/main" xmlns:r="http://schemas.openxmlformats.org/officeDocument/2006/relationships" xmlns:p="http://schemas.openxmlformats.org/presentationml/2006/main">
   <p:cSld>
     <p:spTree>
@@ -5653,7 +5751,7 @@
 </p:sld>
 </file>
 
-<file path=ppt/slides/slide15.xml><?xml version="1.0" encoding="utf-8"?>
+<file path=ppt/slides/slide16.xml><?xml version="1.0" encoding="utf-8"?>
 <p:sld xmlns:a="http://schemas.openxmlformats.org/drawingml/2006/main" xmlns:r="http://schemas.openxmlformats.org/officeDocument/2006/relationships" xmlns:p="http://schemas.openxmlformats.org/presentationml/2006/main">
   <p:cSld>
     <p:spTree>
@@ -5828,7 +5926,7 @@
 </p:sld>
 </file>
 
-<file path=ppt/slides/slide16.xml><?xml version="1.0" encoding="utf-8"?>
+<file path=ppt/slides/slide17.xml><?xml version="1.0" encoding="utf-8"?>
 <p:sld xmlns:a="http://schemas.openxmlformats.org/drawingml/2006/main" xmlns:r="http://schemas.openxmlformats.org/officeDocument/2006/relationships" xmlns:p="http://schemas.openxmlformats.org/presentationml/2006/main">
   <p:cSld>
     <p:spTree>
@@ -6011,7 +6109,7 @@
 </p:sld>
 </file>
 
-<file path=ppt/slides/slide17.xml><?xml version="1.0" encoding="utf-8"?>
+<file path=ppt/slides/slide18.xml><?xml version="1.0" encoding="utf-8"?>
 <p:sld xmlns:a="http://schemas.openxmlformats.org/drawingml/2006/main" xmlns:r="http://schemas.openxmlformats.org/officeDocument/2006/relationships" xmlns:p="http://schemas.openxmlformats.org/presentationml/2006/main">
   <p:cSld>
     <p:spTree>
@@ -6139,7 +6237,7 @@
 </p:sld>
 </file>
 
-<file path=ppt/slides/slide18.xml><?xml version="1.0" encoding="utf-8"?>
+<file path=ppt/slides/slide19.xml><?xml version="1.0" encoding="utf-8"?>
 <p:sld xmlns:a="http://schemas.openxmlformats.org/drawingml/2006/main" xmlns:r="http://schemas.openxmlformats.org/officeDocument/2006/relationships" xmlns:p="http://schemas.openxmlformats.org/presentationml/2006/main">
   <p:cSld>
     <p:spTree>
@@ -6232,7 +6330,7 @@
                 <a:latin typeface="Times New Roman" panose="02020603050405020304" pitchFamily="18" charset="0"/>
                 <a:cs typeface="Times New Roman" panose="02020603050405020304" pitchFamily="18" charset="0"/>
               </a:rPr>
-              <a:t>Shows number of releases and popularity over time</a:t>
+              <a:t>Shows number of releases over time</a:t>
             </a:r>
           </a:p>
           <a:p>
@@ -6311,131 +6409,6 @@
     <p:extLst>
       <p:ext uri="{BB962C8B-B14F-4D97-AF65-F5344CB8AC3E}">
         <p14:creationId xmlns:p14="http://schemas.microsoft.com/office/powerpoint/2010/main" val="2090295484"/>
-      </p:ext>
-    </p:extLst>
-  </p:cSld>
-  <p:clrMapOvr>
-    <a:masterClrMapping/>
-  </p:clrMapOvr>
-</p:sld>
-</file>
-
-<file path=ppt/slides/slide19.xml><?xml version="1.0" encoding="utf-8"?>
-<p:sld xmlns:a="http://schemas.openxmlformats.org/drawingml/2006/main" xmlns:r="http://schemas.openxmlformats.org/officeDocument/2006/relationships" xmlns:p="http://schemas.openxmlformats.org/presentationml/2006/main">
-  <p:cSld>
-    <p:spTree>
-      <p:nvGrpSpPr>
-        <p:cNvPr id="1" name=""/>
-        <p:cNvGrpSpPr/>
-        <p:nvPr/>
-      </p:nvGrpSpPr>
-      <p:grpSpPr>
-        <a:xfrm>
-          <a:off x="0" y="0"/>
-          <a:ext cx="0" cy="0"/>
-          <a:chOff x="0" y="0"/>
-          <a:chExt cx="0" cy="0"/>
-        </a:xfrm>
-      </p:grpSpPr>
-      <p:sp>
-        <p:nvSpPr>
-          <p:cNvPr id="2" name="Title 1">
-            <a:extLst>
-              <a:ext uri="{FF2B5EF4-FFF2-40B4-BE49-F238E27FC236}">
-                <a16:creationId xmlns:a16="http://schemas.microsoft.com/office/drawing/2014/main" id="{9570EB2A-0F7A-EECC-5C50-5B6515E336E0}"/>
-              </a:ext>
-            </a:extLst>
-          </p:cNvPr>
-          <p:cNvSpPr>
-            <a:spLocks noGrp="1"/>
-          </p:cNvSpPr>
-          <p:nvPr>
-            <p:ph type="title"/>
-          </p:nvPr>
-        </p:nvSpPr>
-        <p:spPr/>
-        <p:txBody>
-          <a:bodyPr/>
-          <a:lstStyle/>
-          <a:p>
-            <a:r>
-              <a:rPr lang="en-IN" dirty="0">
-                <a:latin typeface="Times New Roman" panose="02020603050405020304" pitchFamily="18" charset="0"/>
-                <a:cs typeface="Times New Roman" panose="02020603050405020304" pitchFamily="18" charset="0"/>
-              </a:rPr>
-              <a:t>Key Insights Summary</a:t>
-            </a:r>
-          </a:p>
-        </p:txBody>
-      </p:sp>
-      <p:sp>
-        <p:nvSpPr>
-          <p:cNvPr id="3" name="Content Placeholder 2">
-            <a:extLst>
-              <a:ext uri="{FF2B5EF4-FFF2-40B4-BE49-F238E27FC236}">
-                <a16:creationId xmlns:a16="http://schemas.microsoft.com/office/drawing/2014/main" id="{8E4FE667-AA4B-0F38-6413-2E14A856CC84}"/>
-              </a:ext>
-            </a:extLst>
-          </p:cNvPr>
-          <p:cNvSpPr>
-            <a:spLocks noGrp="1"/>
-          </p:cNvSpPr>
-          <p:nvPr>
-            <p:ph idx="1"/>
-          </p:nvPr>
-        </p:nvSpPr>
-        <p:spPr/>
-        <p:txBody>
-          <a:bodyPr>
-            <a:normAutofit/>
-          </a:bodyPr>
-          <a:lstStyle/>
-          <a:p>
-            <a:r>
-              <a:rPr lang="en-IN" sz="3600" dirty="0">
-                <a:latin typeface="Times New Roman" panose="02020603050405020304" pitchFamily="18" charset="0"/>
-                <a:cs typeface="Times New Roman" panose="02020603050405020304" pitchFamily="18" charset="0"/>
-              </a:rPr>
-              <a:t>Action genre → highest revenue</a:t>
-            </a:r>
-          </a:p>
-          <a:p>
-            <a:r>
-              <a:rPr lang="en-US" sz="3600" dirty="0">
-                <a:latin typeface="Times New Roman" panose="02020603050405020304" pitchFamily="18" charset="0"/>
-                <a:cs typeface="Times New Roman" panose="02020603050405020304" pitchFamily="18" charset="0"/>
-              </a:rPr>
-              <a:t>Budget → strong correlation with revenue</a:t>
-            </a:r>
-          </a:p>
-          <a:p>
-            <a:r>
-              <a:rPr lang="en-IN" sz="3600" dirty="0">
-                <a:latin typeface="Times New Roman" panose="02020603050405020304" pitchFamily="18" charset="0"/>
-                <a:cs typeface="Times New Roman" panose="02020603050405020304" pitchFamily="18" charset="0"/>
-              </a:rPr>
-              <a:t>English → dominant language</a:t>
-            </a:r>
-          </a:p>
-          <a:p>
-            <a:r>
-              <a:rPr lang="en-US" sz="3600" dirty="0">
-                <a:latin typeface="Times New Roman" panose="02020603050405020304" pitchFamily="18" charset="0"/>
-                <a:cs typeface="Times New Roman" panose="02020603050405020304" pitchFamily="18" charset="0"/>
-              </a:rPr>
-              <a:t>Increasing trend in content production</a:t>
-            </a:r>
-            <a:endParaRPr lang="en-IN" sz="3600" dirty="0">
-              <a:latin typeface="Times New Roman" panose="02020603050405020304" pitchFamily="18" charset="0"/>
-              <a:cs typeface="Times New Roman" panose="02020603050405020304" pitchFamily="18" charset="0"/>
-            </a:endParaRPr>
-          </a:p>
-        </p:txBody>
-      </p:sp>
-    </p:spTree>
-    <p:extLst>
-      <p:ext uri="{BB962C8B-B14F-4D97-AF65-F5344CB8AC3E}">
-        <p14:creationId xmlns:p14="http://schemas.microsoft.com/office/powerpoint/2010/main" val="1176663922"/>
       </p:ext>
     </p:extLst>
   </p:cSld>
@@ -6739,6 +6712,131 @@
           <p:cNvPr id="2" name="Title 1">
             <a:extLst>
               <a:ext uri="{FF2B5EF4-FFF2-40B4-BE49-F238E27FC236}">
+                <a16:creationId xmlns:a16="http://schemas.microsoft.com/office/drawing/2014/main" id="{9570EB2A-0F7A-EECC-5C50-5B6515E336E0}"/>
+              </a:ext>
+            </a:extLst>
+          </p:cNvPr>
+          <p:cNvSpPr>
+            <a:spLocks noGrp="1"/>
+          </p:cNvSpPr>
+          <p:nvPr>
+            <p:ph type="title"/>
+          </p:nvPr>
+        </p:nvSpPr>
+        <p:spPr/>
+        <p:txBody>
+          <a:bodyPr/>
+          <a:lstStyle/>
+          <a:p>
+            <a:r>
+              <a:rPr lang="en-IN" dirty="0">
+                <a:latin typeface="Times New Roman" panose="02020603050405020304" pitchFamily="18" charset="0"/>
+                <a:cs typeface="Times New Roman" panose="02020603050405020304" pitchFamily="18" charset="0"/>
+              </a:rPr>
+              <a:t>Key Insights Summary</a:t>
+            </a:r>
+          </a:p>
+        </p:txBody>
+      </p:sp>
+      <p:sp>
+        <p:nvSpPr>
+          <p:cNvPr id="3" name="Content Placeholder 2">
+            <a:extLst>
+              <a:ext uri="{FF2B5EF4-FFF2-40B4-BE49-F238E27FC236}">
+                <a16:creationId xmlns:a16="http://schemas.microsoft.com/office/drawing/2014/main" id="{8E4FE667-AA4B-0F38-6413-2E14A856CC84}"/>
+              </a:ext>
+            </a:extLst>
+          </p:cNvPr>
+          <p:cNvSpPr>
+            <a:spLocks noGrp="1"/>
+          </p:cNvSpPr>
+          <p:nvPr>
+            <p:ph idx="1"/>
+          </p:nvPr>
+        </p:nvSpPr>
+        <p:spPr/>
+        <p:txBody>
+          <a:bodyPr>
+            <a:normAutofit/>
+          </a:bodyPr>
+          <a:lstStyle/>
+          <a:p>
+            <a:r>
+              <a:rPr lang="en-IN" sz="3600" dirty="0">
+                <a:latin typeface="Times New Roman" panose="02020603050405020304" pitchFamily="18" charset="0"/>
+                <a:cs typeface="Times New Roman" panose="02020603050405020304" pitchFamily="18" charset="0"/>
+              </a:rPr>
+              <a:t>Action genre → highest revenue</a:t>
+            </a:r>
+          </a:p>
+          <a:p>
+            <a:r>
+              <a:rPr lang="en-US" sz="3600" dirty="0">
+                <a:latin typeface="Times New Roman" panose="02020603050405020304" pitchFamily="18" charset="0"/>
+                <a:cs typeface="Times New Roman" panose="02020603050405020304" pitchFamily="18" charset="0"/>
+              </a:rPr>
+              <a:t>Budget → strong correlation with revenue</a:t>
+            </a:r>
+          </a:p>
+          <a:p>
+            <a:r>
+              <a:rPr lang="en-IN" sz="3600" dirty="0">
+                <a:latin typeface="Times New Roman" panose="02020603050405020304" pitchFamily="18" charset="0"/>
+                <a:cs typeface="Times New Roman" panose="02020603050405020304" pitchFamily="18" charset="0"/>
+              </a:rPr>
+              <a:t>English → dominant language</a:t>
+            </a:r>
+          </a:p>
+          <a:p>
+            <a:r>
+              <a:rPr lang="en-US" sz="3600" dirty="0">
+                <a:latin typeface="Times New Roman" panose="02020603050405020304" pitchFamily="18" charset="0"/>
+                <a:cs typeface="Times New Roman" panose="02020603050405020304" pitchFamily="18" charset="0"/>
+              </a:rPr>
+              <a:t>Increasing trend in content production</a:t>
+            </a:r>
+            <a:endParaRPr lang="en-IN" sz="3600" dirty="0">
+              <a:latin typeface="Times New Roman" panose="02020603050405020304" pitchFamily="18" charset="0"/>
+              <a:cs typeface="Times New Roman" panose="02020603050405020304" pitchFamily="18" charset="0"/>
+            </a:endParaRPr>
+          </a:p>
+        </p:txBody>
+      </p:sp>
+    </p:spTree>
+    <p:extLst>
+      <p:ext uri="{BB962C8B-B14F-4D97-AF65-F5344CB8AC3E}">
+        <p14:creationId xmlns:p14="http://schemas.microsoft.com/office/powerpoint/2010/main" val="1176663922"/>
+      </p:ext>
+    </p:extLst>
+  </p:cSld>
+  <p:clrMapOvr>
+    <a:masterClrMapping/>
+  </p:clrMapOvr>
+</p:sld>
+</file>
+
+<file path=ppt/slides/slide21.xml><?xml version="1.0" encoding="utf-8"?>
+<p:sld xmlns:a="http://schemas.openxmlformats.org/drawingml/2006/main" xmlns:r="http://schemas.openxmlformats.org/officeDocument/2006/relationships" xmlns:p="http://schemas.openxmlformats.org/presentationml/2006/main">
+  <p:cSld>
+    <p:spTree>
+      <p:nvGrpSpPr>
+        <p:cNvPr id="1" name=""/>
+        <p:cNvGrpSpPr/>
+        <p:nvPr/>
+      </p:nvGrpSpPr>
+      <p:grpSpPr>
+        <a:xfrm>
+          <a:off x="0" y="0"/>
+          <a:ext cx="0" cy="0"/>
+          <a:chOff x="0" y="0"/>
+          <a:chExt cx="0" cy="0"/>
+        </a:xfrm>
+      </p:grpSpPr>
+      <p:sp>
+        <p:nvSpPr>
+          <p:cNvPr id="2" name="Title 1">
+            <a:extLst>
+              <a:ext uri="{FF2B5EF4-FFF2-40B4-BE49-F238E27FC236}">
                 <a16:creationId xmlns:a16="http://schemas.microsoft.com/office/drawing/2014/main" id="{6434B727-7BDE-B950-7483-BB1A7B10DCFB}"/>
               </a:ext>
             </a:extLst>
@@ -6830,7 +6928,7 @@
 </p:sld>
 </file>
 
-<file path=ppt/slides/slide21.xml><?xml version="1.0" encoding="utf-8"?>
+<file path=ppt/slides/slide22.xml><?xml version="1.0" encoding="utf-8"?>
 <p:sld xmlns:a="http://schemas.openxmlformats.org/drawingml/2006/main" xmlns:r="http://schemas.openxmlformats.org/officeDocument/2006/relationships" xmlns:p="http://schemas.openxmlformats.org/presentationml/2006/main">
   <p:cSld>
     <p:spTree>
@@ -7134,7 +7232,7 @@
                 <a:latin typeface="Times New Roman" panose="02020603050405020304" pitchFamily="18" charset="0"/>
                 <a:cs typeface="Times New Roman" panose="02020603050405020304" pitchFamily="18" charset="0"/>
               </a:rPr>
-              <a:t>How do trends change over time (year-wise or month-wise)?</a:t>
+              <a:t>How do trends change over time year-wise?</a:t>
             </a:r>
           </a:p>
           <a:p>
@@ -7465,7 +7563,7 @@
                 <a:latin typeface="Times New Roman" panose="02020603050405020304" pitchFamily="18" charset="0"/>
                 <a:cs typeface="Times New Roman" panose="02020603050405020304" pitchFamily="18" charset="0"/>
               </a:rPr>
-              <a:t>Creating relationships between tables (Genre, Year, Content, Region).</a:t>
+              <a:t>Creating relationships between tables (Genre, Rating, Production, TimeLine).</a:t>
             </a:r>
           </a:p>
           <a:p>
@@ -7495,7 +7593,7 @@
                 <a:latin typeface="Times New Roman" panose="02020603050405020304" pitchFamily="18" charset="0"/>
                 <a:cs typeface="Times New Roman" panose="02020603050405020304" pitchFamily="18" charset="0"/>
               </a:rPr>
-              <a:t>Charts: Bar chart, Line chart, Scatter plot, Donut chart, Heatmap</a:t>
+              <a:t>Charts: Bar chart, Line chart, Scatter plot, Donut chart.</a:t>
             </a:r>
           </a:p>
           <a:p>
@@ -7706,17 +7804,14 @@
               </a:rPr>
               <a:t>Profit = Revenue – Budget</a:t>
             </a:r>
-          </a:p>
-          <a:p>
-            <a:pPr lvl="1"/>
-            <a:r>
-              <a:rPr lang="en-IN" sz="2000" dirty="0">
-                <a:latin typeface="Times New Roman" panose="02020603050405020304" pitchFamily="18" charset="0"/>
-                <a:cs typeface="Times New Roman" panose="02020603050405020304" pitchFamily="18" charset="0"/>
-              </a:rPr>
-              <a:t>Success Score = Popularity × Rating</a:t>
-            </a:r>
-            <a:endParaRPr lang="en-US" sz="2000" dirty="0">
+            <a:r>
+              <a:rPr lang="en-US" sz="2000" dirty="0">
+                <a:latin typeface="Times New Roman" panose="02020603050405020304" pitchFamily="18" charset="0"/>
+                <a:cs typeface="Times New Roman" panose="02020603050405020304" pitchFamily="18" charset="0"/>
+              </a:rPr>
+              <a:t>.</a:t>
+            </a:r>
+            <a:endParaRPr lang="en-IN" sz="2000" dirty="0">
               <a:latin typeface="Times New Roman" panose="02020603050405020304" pitchFamily="18" charset="0"/>
               <a:cs typeface="Times New Roman" panose="02020603050405020304" pitchFamily="18" charset="0"/>
             </a:endParaRPr>
@@ -7893,14 +7988,14 @@
                 <a:latin typeface="Times New Roman" panose="02020603050405020304" pitchFamily="18" charset="0"/>
                 <a:cs typeface="Times New Roman" panose="02020603050405020304" pitchFamily="18" charset="0"/>
               </a:rPr>
-              <a:t>Top Genre:</a:t>
+              <a:t>Total Profit:</a:t>
             </a:r>
             <a:r>
               <a:rPr lang="en-US" sz="2800" dirty="0">
                 <a:latin typeface="Times New Roman" panose="02020603050405020304" pitchFamily="18" charset="0"/>
                 <a:cs typeface="Times New Roman" panose="02020603050405020304" pitchFamily="18" charset="0"/>
               </a:rPr>
-              <a:t> Genre with highest revenue</a:t>
+              <a:t> Total Profit from all content.</a:t>
             </a:r>
           </a:p>
           <a:p>
